--- a/docs/STM32Cube_Preprocessing_Solution_40min_English.pptx
+++ b/docs/STM32Cube_Preprocessing_Solution_40min_English.pptx
@@ -150,6 +150,58 @@
     </p:ext>
   </p:extLst>
 </p:presentation>
+</file>
+
+<file path=ppt/changesInfos/changesInfo1.xml><?xml version="1.0" encoding="utf-8"?>
+<pc:chgInfo xmlns:a="http://schemas.openxmlformats.org/drawingml/2006/main" xmlns:r="http://schemas.openxmlformats.org/officeDocument/2006/relationships" xmlns:ac="http://schemas.microsoft.com/office/drawing/2013/main/command" xmlns:pc="http://schemas.microsoft.com/office/powerpoint/2013/main/command">
+  <pc:docChgLst>
+    <pc:chgData name="Abir GHARBI" userId="ef92528f-00ab-4d87-966c-386bca485bd0" providerId="ADAL" clId="{F3D16DED-CAA7-4BF5-81E4-89DEDE7057F7}"/>
+    <pc:docChg chg="undo custSel modSld">
+      <pc:chgData name="Abir GHARBI" userId="ef92528f-00ab-4d87-966c-386bca485bd0" providerId="ADAL" clId="{F3D16DED-CAA7-4BF5-81E4-89DEDE7057F7}" dt="2026-07-06T15:37:18.722" v="6" actId="1076"/>
+      <pc:docMkLst>
+        <pc:docMk/>
+      </pc:docMkLst>
+      <pc:sldChg chg="modSp mod">
+        <pc:chgData name="Abir GHARBI" userId="ef92528f-00ab-4d87-966c-386bca485bd0" providerId="ADAL" clId="{F3D16DED-CAA7-4BF5-81E4-89DEDE7057F7}" dt="2026-07-06T15:35:49.226" v="5" actId="14100"/>
+        <pc:sldMkLst>
+          <pc:docMk/>
+          <pc:sldMk cId="0" sldId="262"/>
+        </pc:sldMkLst>
+        <pc:spChg chg="mod">
+          <ac:chgData name="Abir GHARBI" userId="ef92528f-00ab-4d87-966c-386bca485bd0" providerId="ADAL" clId="{F3D16DED-CAA7-4BF5-81E4-89DEDE7057F7}" dt="2026-07-06T15:35:34.807" v="4" actId="27636"/>
+          <ac:spMkLst>
+            <pc:docMk/>
+            <pc:sldMk cId="0" sldId="262"/>
+            <ac:spMk id="12" creationId="{00000000-0000-0000-0000-000000000000}"/>
+          </ac:spMkLst>
+        </pc:spChg>
+        <pc:cxnChg chg="mod">
+          <ac:chgData name="Abir GHARBI" userId="ef92528f-00ab-4d87-966c-386bca485bd0" providerId="ADAL" clId="{F3D16DED-CAA7-4BF5-81E4-89DEDE7057F7}" dt="2026-07-06T15:35:49.226" v="5" actId="14100"/>
+          <ac:cxnSpMkLst>
+            <pc:docMk/>
+            <pc:sldMk cId="0" sldId="262"/>
+            <ac:cxnSpMk id="17" creationId="{00000000-0000-0000-0000-000000000000}"/>
+          </ac:cxnSpMkLst>
+        </pc:cxnChg>
+      </pc:sldChg>
+      <pc:sldChg chg="modSp mod">
+        <pc:chgData name="Abir GHARBI" userId="ef92528f-00ab-4d87-966c-386bca485bd0" providerId="ADAL" clId="{F3D16DED-CAA7-4BF5-81E4-89DEDE7057F7}" dt="2026-07-06T15:37:18.722" v="6" actId="1076"/>
+        <pc:sldMkLst>
+          <pc:docMk/>
+          <pc:sldMk cId="0" sldId="264"/>
+        </pc:sldMkLst>
+        <pc:spChg chg="mod">
+          <ac:chgData name="Abir GHARBI" userId="ef92528f-00ab-4d87-966c-386bca485bd0" providerId="ADAL" clId="{F3D16DED-CAA7-4BF5-81E4-89DEDE7057F7}" dt="2026-07-06T15:37:18.722" v="6" actId="1076"/>
+          <ac:spMkLst>
+            <pc:docMk/>
+            <pc:sldMk cId="0" sldId="264"/>
+            <ac:spMk id="19" creationId="{00000000-0000-0000-0000-000000000000}"/>
+          </ac:spMkLst>
+        </pc:spChg>
+      </pc:sldChg>
+    </pc:docChg>
+  </pc:docChgLst>
+</pc:chgInfo>
 </file>
 
 <file path=ppt/notesMasters/notesMaster1.xml><?xml version="1.0" encoding="utf-8"?>
@@ -25550,6 +25602,7 @@
               </a:defRPr>
             </a:pPr>
             <a:r>
+              <a:rPr dirty="0"/>
               <a:t>Improves signal density before embedding</a:t>
             </a:r>
           </a:p>
@@ -26929,6 +26982,7 @@
               </a:defRPr>
             </a:pPr>
             <a:r>
+              <a:rPr dirty="0"/>
               <a:t>Child 3 - 1000 chars</a:t>
             </a:r>
           </a:p>
@@ -27127,13 +27181,16 @@
       <p:cxnSp>
         <p:nvCxnSpPr>
           <p:cNvPr id="17" name="Connector 16"/>
-          <p:cNvCxnSpPr/>
+          <p:cNvCxnSpPr>
+            <a:cxnSpLocks/>
+            <a:stCxn id="14" idx="2"/>
+          </p:cNvCxnSpPr>
           <p:nvPr/>
         </p:nvCxnSpPr>
         <p:spPr>
           <a:xfrm flipH="1">
-            <a:off x="4031999" y="1620000"/>
-            <a:ext cx="864001" cy="612000"/>
+            <a:off x="4031999" y="1332000"/>
+            <a:ext cx="1602001" cy="900000"/>
           </a:xfrm>
           <a:prstGeom prst="line">
             <a:avLst/>
@@ -27349,6 +27406,7 @@
               </a:defRPr>
             </a:pPr>
             <a:r>
+              <a:rPr dirty="0"/>
               <a:t>Pipeline implication: each document must stay coherent when split into 1000-char child chunks and 3000-char parent context blocks.</a:t>
             </a:r>
           </a:p>
@@ -28772,7 +28830,7 @@
         </p:nvSpPr>
         <p:spPr>
           <a:xfrm>
-            <a:off x="432000" y="3384000"/>
+            <a:off x="432000" y="3567600"/>
             <a:ext cx="7920000" cy="503999"/>
           </a:xfrm>
           <a:prstGeom prst="roundRect">
